--- a/Docments/tex/映像・演出関連企画書.pptx
+++ b/Docments/tex/映像・演出関連企画書.pptx
@@ -8,12 +8,15 @@
     <p:sldId id="256" r:id="rId2"/>
     <p:sldId id="257" r:id="rId3"/>
     <p:sldId id="258" r:id="rId4"/>
-    <p:sldId id="259" r:id="rId5"/>
-    <p:sldId id="260" r:id="rId6"/>
-    <p:sldId id="262" r:id="rId7"/>
-    <p:sldId id="261" r:id="rId8"/>
-    <p:sldId id="263" r:id="rId9"/>
-    <p:sldId id="264" r:id="rId10"/>
+    <p:sldId id="267" r:id="rId5"/>
+    <p:sldId id="265" r:id="rId6"/>
+    <p:sldId id="266" r:id="rId7"/>
+    <p:sldId id="259" r:id="rId8"/>
+    <p:sldId id="260" r:id="rId9"/>
+    <p:sldId id="261" r:id="rId10"/>
+    <p:sldId id="262" r:id="rId11"/>
+    <p:sldId id="263" r:id="rId12"/>
+    <p:sldId id="264" r:id="rId13"/>
   </p:sldIdLst>
   <p:sldSz cx="12192000" cy="6858000"/>
   <p:notesSz cx="6858000" cy="9144000"/>
@@ -3691,6 +3694,288 @@
 </p:sld>
 </file>
 
+<file path=ppt/slides/slide10.xml><?xml version="1.0" encoding="utf-8"?>
+<p:sld xmlns:a="http://schemas.openxmlformats.org/drawingml/2006/main" xmlns:r="http://schemas.openxmlformats.org/officeDocument/2006/relationships" xmlns:p="http://schemas.openxmlformats.org/presentationml/2006/main">
+  <p:cSld>
+    <p:spTree>
+      <p:nvGrpSpPr>
+        <p:cNvPr id="1" name=""/>
+        <p:cNvGrpSpPr/>
+        <p:nvPr/>
+      </p:nvGrpSpPr>
+      <p:grpSpPr>
+        <a:xfrm>
+          <a:off x="0" y="0"/>
+          <a:ext cx="0" cy="0"/>
+          <a:chOff x="0" y="0"/>
+          <a:chExt cx="0" cy="0"/>
+        </a:xfrm>
+      </p:grpSpPr>
+      <p:sp>
+        <p:nvSpPr>
+          <p:cNvPr id="2" name="タイトル 1">
+            <a:extLst>
+              <a:ext uri="{FF2B5EF4-FFF2-40B4-BE49-F238E27FC236}">
+                <a16:creationId xmlns:a16="http://schemas.microsoft.com/office/drawing/2014/main" id="{947F6CE5-ECE4-4571-AE7B-4E500E2B8CAC}"/>
+              </a:ext>
+            </a:extLst>
+          </p:cNvPr>
+          <p:cNvSpPr>
+            <a:spLocks noGrp="1"/>
+          </p:cNvSpPr>
+          <p:nvPr>
+            <p:ph type="title"/>
+          </p:nvPr>
+        </p:nvSpPr>
+        <p:spPr/>
+        <p:txBody>
+          <a:bodyPr/>
+          <a:lstStyle/>
+          <a:p>
+            <a:r>
+              <a:rPr kumimoji="1" lang="ja-JP" altLang="en-US" dirty="0">
+                <a:latin typeface="HGS創英ﾌﾟﾚｾﾞﾝｽEB" panose="02020800000000000000" pitchFamily="18" charset="-128"/>
+                <a:ea typeface="HGS創英ﾌﾟﾚｾﾞﾝｽEB" panose="02020800000000000000" pitchFamily="18" charset="-128"/>
+              </a:rPr>
+              <a:t>特化</a:t>
+            </a:r>
+            <a:r>
+              <a:rPr kumimoji="1" lang="en-US" altLang="ja-JP" dirty="0">
+                <a:latin typeface="HGS創英ﾌﾟﾚｾﾞﾝｽEB" panose="02020800000000000000" pitchFamily="18" charset="-128"/>
+                <a:ea typeface="HGS創英ﾌﾟﾚｾﾞﾝｽEB" panose="02020800000000000000" pitchFamily="18" charset="-128"/>
+              </a:rPr>
+              <a:t>ZONE</a:t>
+            </a:r>
+            <a:endParaRPr kumimoji="1" lang="ja-JP" altLang="en-US" dirty="0">
+              <a:latin typeface="HGS創英ﾌﾟﾚｾﾞﾝｽEB" panose="02020800000000000000" pitchFamily="18" charset="-128"/>
+              <a:ea typeface="HGS創英ﾌﾟﾚｾﾞﾝｽEB" panose="02020800000000000000" pitchFamily="18" charset="-128"/>
+            </a:endParaRPr>
+          </a:p>
+        </p:txBody>
+      </p:sp>
+      <p:sp>
+        <p:nvSpPr>
+          <p:cNvPr id="3" name="コンテンツ プレースホルダー 2">
+            <a:extLst>
+              <a:ext uri="{FF2B5EF4-FFF2-40B4-BE49-F238E27FC236}">
+                <a16:creationId xmlns:a16="http://schemas.microsoft.com/office/drawing/2014/main" id="{F9BA4085-8CC2-45B9-8120-C1FF4A492A76}"/>
+              </a:ext>
+            </a:extLst>
+          </p:cNvPr>
+          <p:cNvSpPr>
+            <a:spLocks noGrp="1"/>
+          </p:cNvSpPr>
+          <p:nvPr>
+            <p:ph idx="1"/>
+          </p:nvPr>
+        </p:nvSpPr>
+        <p:spPr/>
+        <p:txBody>
+          <a:bodyPr/>
+          <a:lstStyle/>
+          <a:p>
+            <a:endParaRPr kumimoji="1" lang="ja-JP" altLang="en-US" dirty="0"/>
+          </a:p>
+        </p:txBody>
+      </p:sp>
+    </p:spTree>
+    <p:extLst>
+      <p:ext uri="{BB962C8B-B14F-4D97-AF65-F5344CB8AC3E}">
+        <p14:creationId xmlns:p14="http://schemas.microsoft.com/office/powerpoint/2010/main" val="2675775565"/>
+      </p:ext>
+    </p:extLst>
+  </p:cSld>
+  <p:clrMapOvr>
+    <a:masterClrMapping/>
+  </p:clrMapOvr>
+</p:sld>
+</file>
+
+<file path=ppt/slides/slide11.xml><?xml version="1.0" encoding="utf-8"?>
+<p:sld xmlns:a="http://schemas.openxmlformats.org/drawingml/2006/main" xmlns:r="http://schemas.openxmlformats.org/officeDocument/2006/relationships" xmlns:p="http://schemas.openxmlformats.org/presentationml/2006/main">
+  <p:cSld>
+    <p:spTree>
+      <p:nvGrpSpPr>
+        <p:cNvPr id="1" name=""/>
+        <p:cNvGrpSpPr/>
+        <p:nvPr/>
+      </p:nvGrpSpPr>
+      <p:grpSpPr>
+        <a:xfrm>
+          <a:off x="0" y="0"/>
+          <a:ext cx="0" cy="0"/>
+          <a:chOff x="0" y="0"/>
+          <a:chExt cx="0" cy="0"/>
+        </a:xfrm>
+      </p:grpSpPr>
+      <p:sp>
+        <p:nvSpPr>
+          <p:cNvPr id="2" name="タイトル 1">
+            <a:extLst>
+              <a:ext uri="{FF2B5EF4-FFF2-40B4-BE49-F238E27FC236}">
+                <a16:creationId xmlns:a16="http://schemas.microsoft.com/office/drawing/2014/main" id="{52CF1521-55D2-4666-A1BE-91267A0B0195}"/>
+              </a:ext>
+            </a:extLst>
+          </p:cNvPr>
+          <p:cNvSpPr>
+            <a:spLocks noGrp="1"/>
+          </p:cNvSpPr>
+          <p:nvPr>
+            <p:ph type="title"/>
+          </p:nvPr>
+        </p:nvSpPr>
+        <p:spPr/>
+        <p:txBody>
+          <a:bodyPr/>
+          <a:lstStyle/>
+          <a:p>
+            <a:r>
+              <a:rPr kumimoji="1" lang="ja-JP" altLang="en-US" dirty="0">
+                <a:latin typeface="HGS創英ﾌﾟﾚｾﾞﾝｽEB" panose="02020800000000000000" pitchFamily="18" charset="-128"/>
+                <a:ea typeface="HGS創英ﾌﾟﾚｾﾞﾝｽEB" panose="02020800000000000000" pitchFamily="18" charset="-128"/>
+              </a:rPr>
+              <a:t>ボーナス</a:t>
+            </a:r>
+          </a:p>
+        </p:txBody>
+      </p:sp>
+      <p:sp>
+        <p:nvSpPr>
+          <p:cNvPr id="3" name="コンテンツ プレースホルダー 2">
+            <a:extLst>
+              <a:ext uri="{FF2B5EF4-FFF2-40B4-BE49-F238E27FC236}">
+                <a16:creationId xmlns:a16="http://schemas.microsoft.com/office/drawing/2014/main" id="{B876A347-A883-4D5D-A792-E875F7F66CC5}"/>
+              </a:ext>
+            </a:extLst>
+          </p:cNvPr>
+          <p:cNvSpPr>
+            <a:spLocks noGrp="1"/>
+          </p:cNvSpPr>
+          <p:nvPr>
+            <p:ph idx="1"/>
+          </p:nvPr>
+        </p:nvSpPr>
+        <p:spPr/>
+        <p:txBody>
+          <a:bodyPr/>
+          <a:lstStyle/>
+          <a:p>
+            <a:r>
+              <a:rPr kumimoji="1" lang="ja-JP" altLang="en-US" dirty="0"/>
+              <a:t>カバネリアタック</a:t>
+            </a:r>
+            <a:endParaRPr kumimoji="1" lang="en-US" altLang="ja-JP" dirty="0"/>
+          </a:p>
+          <a:p>
+            <a:r>
+              <a:rPr lang="ja-JP" altLang="en-US" dirty="0"/>
+              <a:t>ライズ</a:t>
+            </a:r>
+            <a:r>
+              <a:rPr lang="en-US" altLang="ja-JP" dirty="0"/>
+              <a:t>ZONE</a:t>
+            </a:r>
+            <a:r>
+              <a:rPr lang="ja-JP" altLang="en-US" dirty="0"/>
+              <a:t>・・・貰える枚数変化</a:t>
+            </a:r>
+            <a:endParaRPr kumimoji="1" lang="ja-JP" altLang="en-US" dirty="0"/>
+          </a:p>
+        </p:txBody>
+      </p:sp>
+    </p:spTree>
+    <p:extLst>
+      <p:ext uri="{BB962C8B-B14F-4D97-AF65-F5344CB8AC3E}">
+        <p14:creationId xmlns:p14="http://schemas.microsoft.com/office/powerpoint/2010/main" val="2875294183"/>
+      </p:ext>
+    </p:extLst>
+  </p:cSld>
+  <p:clrMapOvr>
+    <a:masterClrMapping/>
+  </p:clrMapOvr>
+</p:sld>
+</file>
+
+<file path=ppt/slides/slide12.xml><?xml version="1.0" encoding="utf-8"?>
+<p:sld xmlns:a="http://schemas.openxmlformats.org/drawingml/2006/main" xmlns:r="http://schemas.openxmlformats.org/officeDocument/2006/relationships" xmlns:p="http://schemas.openxmlformats.org/presentationml/2006/main">
+  <p:cSld>
+    <p:spTree>
+      <p:nvGrpSpPr>
+        <p:cNvPr id="1" name=""/>
+        <p:cNvGrpSpPr/>
+        <p:nvPr/>
+      </p:nvGrpSpPr>
+      <p:grpSpPr>
+        <a:xfrm>
+          <a:off x="0" y="0"/>
+          <a:ext cx="0" cy="0"/>
+          <a:chOff x="0" y="0"/>
+          <a:chExt cx="0" cy="0"/>
+        </a:xfrm>
+      </p:grpSpPr>
+      <p:sp>
+        <p:nvSpPr>
+          <p:cNvPr id="2" name="タイトル 1">
+            <a:extLst>
+              <a:ext uri="{FF2B5EF4-FFF2-40B4-BE49-F238E27FC236}">
+                <a16:creationId xmlns:a16="http://schemas.microsoft.com/office/drawing/2014/main" id="{06CC1E36-7A71-431B-A5E7-D23665CF5C28}"/>
+              </a:ext>
+            </a:extLst>
+          </p:cNvPr>
+          <p:cNvSpPr>
+            <a:spLocks noGrp="1"/>
+          </p:cNvSpPr>
+          <p:nvPr>
+            <p:ph type="title"/>
+          </p:nvPr>
+        </p:nvSpPr>
+        <p:spPr/>
+        <p:txBody>
+          <a:bodyPr/>
+          <a:lstStyle/>
+          <a:p>
+            <a:endParaRPr kumimoji="1" lang="ja-JP" altLang="en-US"/>
+          </a:p>
+        </p:txBody>
+      </p:sp>
+      <p:sp>
+        <p:nvSpPr>
+          <p:cNvPr id="3" name="コンテンツ プレースホルダー 2">
+            <a:extLst>
+              <a:ext uri="{FF2B5EF4-FFF2-40B4-BE49-F238E27FC236}">
+                <a16:creationId xmlns:a16="http://schemas.microsoft.com/office/drawing/2014/main" id="{CE390919-33B1-4468-B1DC-595E5C4E41FD}"/>
+              </a:ext>
+            </a:extLst>
+          </p:cNvPr>
+          <p:cNvSpPr>
+            <a:spLocks noGrp="1"/>
+          </p:cNvSpPr>
+          <p:nvPr>
+            <p:ph idx="1"/>
+          </p:nvPr>
+        </p:nvSpPr>
+        <p:spPr/>
+        <p:txBody>
+          <a:bodyPr/>
+          <a:lstStyle/>
+          <a:p>
+            <a:endParaRPr kumimoji="1" lang="ja-JP" altLang="en-US"/>
+          </a:p>
+        </p:txBody>
+      </p:sp>
+    </p:spTree>
+    <p:extLst>
+      <p:ext uri="{BB962C8B-B14F-4D97-AF65-F5344CB8AC3E}">
+        <p14:creationId xmlns:p14="http://schemas.microsoft.com/office/powerpoint/2010/main" val="2805746876"/>
+      </p:ext>
+    </p:extLst>
+  </p:cSld>
+  <p:clrMapOvr>
+    <a:masterClrMapping/>
+  </p:clrMapOvr>
+</p:sld>
+</file>
+
 <file path=ppt/slides/slide2.xml><?xml version="1.0" encoding="utf-8"?>
 <p:sld xmlns:a="http://schemas.openxmlformats.org/drawingml/2006/main" xmlns:r="http://schemas.openxmlformats.org/officeDocument/2006/relationships" xmlns:p="http://schemas.openxmlformats.org/presentationml/2006/main">
   <p:cSld>
@@ -4476,7 +4761,7 @@
           <p:cNvPr id="2" name="タイトル 1">
             <a:extLst>
               <a:ext uri="{FF2B5EF4-FFF2-40B4-BE49-F238E27FC236}">
-                <a16:creationId xmlns:a16="http://schemas.microsoft.com/office/drawing/2014/main" id="{B85BF969-81D7-4DF0-8ECC-B2B51B744350}"/>
+                <a16:creationId xmlns:a16="http://schemas.microsoft.com/office/drawing/2014/main" id="{67D14526-EB2D-4377-8969-2C196A3F6974}"/>
               </a:ext>
             </a:extLst>
           </p:cNvPr>
@@ -4493,25 +4778,8 @@
           <a:lstStyle/>
           <a:p>
             <a:r>
-              <a:rPr kumimoji="1" lang="ja-JP" altLang="en-US" dirty="0">
-                <a:latin typeface="HGP創英ﾌﾟﾚｾﾞﾝｽEB" panose="02020800000000000000" pitchFamily="18" charset="-128"/>
-                <a:ea typeface="HGP創英ﾌﾟﾚｾﾞﾝｽEB" panose="02020800000000000000" pitchFamily="18" charset="-128"/>
-              </a:rPr>
-              <a:t>ラッシュ中の直乗せ</a:t>
-            </a:r>
-            <a:r>
-              <a:rPr kumimoji="1" lang="en-US" altLang="ja-JP" dirty="0">
-                <a:latin typeface="HGP創英ﾌﾟﾚｾﾞﾝｽEB" panose="02020800000000000000" pitchFamily="18" charset="-128"/>
-                <a:ea typeface="HGP創英ﾌﾟﾚｾﾞﾝｽEB" panose="02020800000000000000" pitchFamily="18" charset="-128"/>
-              </a:rPr>
-              <a:t>…</a:t>
-            </a:r>
-            <a:r>
-              <a:rPr kumimoji="1" lang="ja-JP" altLang="en-US" dirty="0">
-                <a:latin typeface="HGP創英ﾌﾟﾚｾﾞﾝｽEB" panose="02020800000000000000" pitchFamily="18" charset="-128"/>
-                <a:ea typeface="HGP創英ﾌﾟﾚｾﾞﾝｽEB" panose="02020800000000000000" pitchFamily="18" charset="-128"/>
-              </a:rPr>
-              <a:t>あり</a:t>
+              <a:rPr kumimoji="1" lang="ja-JP" altLang="en-US" dirty="0"/>
+              <a:t>ステージアップ</a:t>
             </a:r>
           </a:p>
         </p:txBody>
@@ -4521,7 +4789,7 @@
           <p:cNvPr id="3" name="コンテンツ プレースホルダー 2">
             <a:extLst>
               <a:ext uri="{FF2B5EF4-FFF2-40B4-BE49-F238E27FC236}">
-                <a16:creationId xmlns:a16="http://schemas.microsoft.com/office/drawing/2014/main" id="{76AD72F4-A7B5-4B72-8646-E5394C0FDFC6}"/>
+                <a16:creationId xmlns:a16="http://schemas.microsoft.com/office/drawing/2014/main" id="{DE35741F-E115-4038-B045-6EFFC2AC517F}"/>
               </a:ext>
             </a:extLst>
           </p:cNvPr>
@@ -4537,22 +4805,14 @@
           <a:bodyPr/>
           <a:lstStyle/>
           <a:p>
-            <a:r>
-              <a:rPr kumimoji="1" lang="ja-JP" altLang="en-US" dirty="0"/>
-              <a:t>演出</a:t>
-            </a:r>
-            <a:r>
-              <a:rPr lang="ja-JP" altLang="en-US" dirty="0"/>
-              <a:t>中はキャラが出てから上乗せを参考にする</a:t>
-            </a:r>
-            <a:endParaRPr kumimoji="1" lang="ja-JP" altLang="en-US" dirty="0"/>
+            <a:endParaRPr kumimoji="1" lang="ja-JP" altLang="en-US"/>
           </a:p>
         </p:txBody>
       </p:sp>
     </p:spTree>
     <p:extLst>
       <p:ext uri="{BB962C8B-B14F-4D97-AF65-F5344CB8AC3E}">
-        <p14:creationId xmlns:p14="http://schemas.microsoft.com/office/powerpoint/2010/main" val="4125349606"/>
+        <p14:creationId xmlns:p14="http://schemas.microsoft.com/office/powerpoint/2010/main" val="1428169373"/>
       </p:ext>
     </p:extLst>
   </p:cSld>
@@ -4584,7 +4844,7 @@
           <p:cNvPr id="2" name="タイトル 1">
             <a:extLst>
               <a:ext uri="{FF2B5EF4-FFF2-40B4-BE49-F238E27FC236}">
-                <a16:creationId xmlns:a16="http://schemas.microsoft.com/office/drawing/2014/main" id="{59ED1BAB-22A6-447B-99E3-2277ECF2E9E7}"/>
+                <a16:creationId xmlns:a16="http://schemas.microsoft.com/office/drawing/2014/main" id="{F85BC7A3-5D9A-446A-9E4E-C2CEB83C42F1}"/>
               </a:ext>
             </a:extLst>
           </p:cNvPr>
@@ -4595,53 +4855,636 @@
             <p:ph type="title"/>
           </p:nvPr>
         </p:nvSpPr>
-        <p:spPr/>
-        <p:txBody>
-          <a:bodyPr/>
-          <a:lstStyle/>
-          <a:p>
+        <p:spPr>
+          <a:xfrm>
+            <a:off x="149432" y="-221365"/>
+            <a:ext cx="10515600" cy="1325563"/>
+          </a:xfrm>
+        </p:spPr>
+        <p:txBody>
+          <a:bodyPr/>
+          <a:lstStyle/>
+          <a:p>
+            <a:r>
+              <a:rPr kumimoji="1" lang="en-US" altLang="ja-JP" dirty="0">
+                <a:latin typeface="HGP創英ﾌﾟﾚｾﾞﾝｽEB" panose="02020800000000000000" pitchFamily="18" charset="-128"/>
+                <a:ea typeface="HGP創英ﾌﾟﾚｾﾞﾝｽEB" panose="02020800000000000000" pitchFamily="18" charset="-128"/>
+              </a:rPr>
+              <a:t>UI</a:t>
+            </a:r>
             <a:r>
               <a:rPr kumimoji="1" lang="ja-JP" altLang="en-US" dirty="0">
-                <a:latin typeface="HGS創英ﾌﾟﾚｾﾞﾝｽEB" panose="02020800000000000000" pitchFamily="18" charset="-128"/>
-                <a:ea typeface="HGS創英ﾌﾟﾚｾﾞﾝｽEB" panose="02020800000000000000" pitchFamily="18" charset="-128"/>
+                <a:latin typeface="HGP創英ﾌﾟﾚｾﾞﾝｽEB" panose="02020800000000000000" pitchFamily="18" charset="-128"/>
+                <a:ea typeface="HGP創英ﾌﾟﾚｾﾞﾝｽEB" panose="02020800000000000000" pitchFamily="18" charset="-128"/>
+              </a:rPr>
+              <a:t>配置</a:t>
+            </a:r>
+          </a:p>
+        </p:txBody>
+      </p:sp>
+      <p:pic>
+        <p:nvPicPr>
+          <p:cNvPr id="2050" name="Picture 2" descr="AT「幻想殺しRUSH」｜インデックス2（スマスロ とある魔術の禁書目録2）｜パチスロ スロット">
+            <a:extLst>
+              <a:ext uri="{FF2B5EF4-FFF2-40B4-BE49-F238E27FC236}">
+                <a16:creationId xmlns:a16="http://schemas.microsoft.com/office/drawing/2014/main" id="{B02B4180-A573-4DDB-B65C-0847EEB2677F}"/>
+              </a:ext>
+            </a:extLst>
+          </p:cNvPr>
+          <p:cNvPicPr>
+            <a:picLocks noChangeAspect="1" noChangeArrowheads="1"/>
+          </p:cNvPicPr>
+          <p:nvPr/>
+        </p:nvPicPr>
+        <p:blipFill>
+          <a:blip r:embed="rId2">
+            <a:extLst>
+              <a:ext uri="{28A0092B-C50C-407E-A947-70E740481C1C}">
+                <a14:useLocalDpi xmlns:a14="http://schemas.microsoft.com/office/drawing/2010/main" val="0"/>
+              </a:ext>
+            </a:extLst>
+          </a:blip>
+          <a:srcRect/>
+          <a:stretch>
+            <a:fillRect/>
+          </a:stretch>
+        </p:blipFill>
+        <p:spPr bwMode="auto">
+          <a:xfrm>
+            <a:off x="3635205" y="1392175"/>
+            <a:ext cx="5459196" cy="4367357"/>
+          </a:xfrm>
+          <a:prstGeom prst="rect">
+            <a:avLst/>
+          </a:prstGeom>
+          <a:noFill/>
+          <a:extLst>
+            <a:ext uri="{909E8E84-426E-40DD-AFC4-6F175D3DCCD1}">
+              <a14:hiddenFill xmlns:a14="http://schemas.microsoft.com/office/drawing/2010/main">
+                <a:solidFill>
+                  <a:srgbClr val="FFFFFF"/>
+                </a:solidFill>
+              </a14:hiddenFill>
+            </a:ext>
+          </a:extLst>
+        </p:spPr>
+      </p:pic>
+      <p:pic>
+        <p:nvPicPr>
+          <p:cNvPr id="5" name="Picture 4" descr="ミリオンゴッド-神々の凱旋-（パチスロ）設定判別・天井・ゾーン・解析 GOD神々の凱旋">
+            <a:extLst>
+              <a:ext uri="{FF2B5EF4-FFF2-40B4-BE49-F238E27FC236}">
+                <a16:creationId xmlns:a16="http://schemas.microsoft.com/office/drawing/2014/main" id="{71C61F1F-2F0F-49E1-834C-80B01D2B024F}"/>
+              </a:ext>
+            </a:extLst>
+          </p:cNvPr>
+          <p:cNvPicPr>
+            <a:picLocks noChangeAspect="1" noChangeArrowheads="1"/>
+          </p:cNvPicPr>
+          <p:nvPr/>
+        </p:nvPicPr>
+        <p:blipFill rotWithShape="1">
+          <a:blip r:embed="rId3">
+            <a:extLst>
+              <a:ext uri="{28A0092B-C50C-407E-A947-70E740481C1C}">
+                <a14:useLocalDpi xmlns:a14="http://schemas.microsoft.com/office/drawing/2010/main" val="0"/>
+              </a:ext>
+            </a:extLst>
+          </a:blip>
+          <a:srcRect l="80181" t="66609" b="21846"/>
+          <a:stretch/>
+        </p:blipFill>
+        <p:spPr bwMode="auto">
+          <a:xfrm>
+            <a:off x="7872943" y="3494314"/>
+            <a:ext cx="1221458" cy="406730"/>
+          </a:xfrm>
+          <a:prstGeom prst="rect">
+            <a:avLst/>
+          </a:prstGeom>
+          <a:noFill/>
+          <a:extLst>
+            <a:ext uri="{909E8E84-426E-40DD-AFC4-6F175D3DCCD1}">
+              <a14:hiddenFill xmlns:a14="http://schemas.microsoft.com/office/drawing/2010/main">
+                <a:solidFill>
+                  <a:srgbClr val="FFFFFF"/>
+                </a:solidFill>
+              </a14:hiddenFill>
+            </a:ext>
+          </a:extLst>
+        </p:spPr>
+      </p:pic>
+      <p:pic>
+        <p:nvPicPr>
+          <p:cNvPr id="6" name="Picture 6" descr="前兆を経てからの上乗せについて｜L ゴジラ対エヴァンゲリオン｜パチンコパチスロ エヴァンゲリオン系 開発こぼれ話">
+            <a:extLst>
+              <a:ext uri="{FF2B5EF4-FFF2-40B4-BE49-F238E27FC236}">
+                <a16:creationId xmlns:a16="http://schemas.microsoft.com/office/drawing/2014/main" id="{CCCFE8EB-9456-4F37-AA7D-ED86EFEE9C27}"/>
+              </a:ext>
+            </a:extLst>
+          </p:cNvPr>
+          <p:cNvPicPr>
+            <a:picLocks noChangeAspect="1" noChangeArrowheads="1"/>
+          </p:cNvPicPr>
+          <p:nvPr/>
+        </p:nvPicPr>
+        <p:blipFill rotWithShape="1">
+          <a:blip r:embed="rId4">
+            <a:extLst>
+              <a:ext uri="{28A0092B-C50C-407E-A947-70E740481C1C}">
+                <a14:useLocalDpi xmlns:a14="http://schemas.microsoft.com/office/drawing/2010/main" val="0"/>
+              </a:ext>
+            </a:extLst>
+          </a:blip>
+          <a:srcRect l="11083" t="79802" r="67741" b="2396"/>
+          <a:stretch/>
+        </p:blipFill>
+        <p:spPr bwMode="auto">
+          <a:xfrm>
+            <a:off x="8079061" y="2811483"/>
+            <a:ext cx="1015340" cy="682831"/>
+          </a:xfrm>
+          <a:prstGeom prst="rect">
+            <a:avLst/>
+          </a:prstGeom>
+          <a:noFill/>
+          <a:extLst>
+            <a:ext uri="{909E8E84-426E-40DD-AFC4-6F175D3DCCD1}">
+              <a14:hiddenFill xmlns:a14="http://schemas.microsoft.com/office/drawing/2010/main">
+                <a:solidFill>
+                  <a:srgbClr val="FFFFFF"/>
+                </a:solidFill>
+              </a14:hiddenFill>
+            </a:ext>
+          </a:extLst>
+        </p:spPr>
+      </p:pic>
+      <p:cxnSp>
+        <p:nvCxnSpPr>
+          <p:cNvPr id="7" name="直線コネクタ 6">
+            <a:extLst>
+              <a:ext uri="{FF2B5EF4-FFF2-40B4-BE49-F238E27FC236}">
+                <a16:creationId xmlns:a16="http://schemas.microsoft.com/office/drawing/2014/main" id="{FDCB354F-3CB9-4F07-8253-46CE8E39D240}"/>
+              </a:ext>
+            </a:extLst>
+          </p:cNvPr>
+          <p:cNvCxnSpPr/>
+          <p:nvPr/>
+        </p:nvCxnSpPr>
+        <p:spPr>
+          <a:xfrm>
+            <a:off x="8888681" y="5438899"/>
+            <a:ext cx="1039090" cy="320633"/>
+          </a:xfrm>
+          <a:prstGeom prst="line">
+            <a:avLst/>
+          </a:prstGeom>
+        </p:spPr>
+        <p:style>
+          <a:lnRef idx="3">
+            <a:schemeClr val="dk1"/>
+          </a:lnRef>
+          <a:fillRef idx="0">
+            <a:schemeClr val="dk1"/>
+          </a:fillRef>
+          <a:effectRef idx="2">
+            <a:schemeClr val="dk1"/>
+          </a:effectRef>
+          <a:fontRef idx="minor">
+            <a:schemeClr val="tx1"/>
+          </a:fontRef>
+        </p:style>
+      </p:cxnSp>
+      <p:sp>
+        <p:nvSpPr>
+          <p:cNvPr id="8" name="テキスト ボックス 7">
+            <a:extLst>
+              <a:ext uri="{FF2B5EF4-FFF2-40B4-BE49-F238E27FC236}">
+                <a16:creationId xmlns:a16="http://schemas.microsoft.com/office/drawing/2014/main" id="{3D2519C8-ABD3-4FDD-A291-BF4F05BF0075}"/>
+              </a:ext>
+            </a:extLst>
+          </p:cNvPr>
+          <p:cNvSpPr txBox="1"/>
+          <p:nvPr/>
+        </p:nvSpPr>
+        <p:spPr>
+          <a:xfrm>
+            <a:off x="9834550" y="5606349"/>
+            <a:ext cx="1251065" cy="369332"/>
+          </a:xfrm>
+          <a:prstGeom prst="rect">
+            <a:avLst/>
+          </a:prstGeom>
+          <a:noFill/>
+        </p:spPr>
+        <p:txBody>
+          <a:bodyPr wrap="square" rtlCol="0">
+            <a:spAutoFit/>
+          </a:bodyPr>
+          <a:lstStyle/>
+          <a:p>
+            <a:r>
+              <a:rPr kumimoji="1" lang="ja-JP" altLang="en-US" dirty="0">
+                <a:latin typeface="HGP明朝B" panose="02020800000000000000" pitchFamily="18" charset="-128"/>
+                <a:ea typeface="HGP明朝B" panose="02020800000000000000" pitchFamily="18" charset="-128"/>
+              </a:rPr>
+              <a:t>ゲーム数</a:t>
+            </a:r>
+          </a:p>
+        </p:txBody>
+      </p:sp>
+      <p:sp>
+        <p:nvSpPr>
+          <p:cNvPr id="10" name="テキスト ボックス 9">
+            <a:extLst>
+              <a:ext uri="{FF2B5EF4-FFF2-40B4-BE49-F238E27FC236}">
+                <a16:creationId xmlns:a16="http://schemas.microsoft.com/office/drawing/2014/main" id="{6133DFCB-CFFC-4F3D-AB82-97A8098B4F12}"/>
+              </a:ext>
+            </a:extLst>
+          </p:cNvPr>
+          <p:cNvSpPr txBox="1"/>
+          <p:nvPr/>
+        </p:nvSpPr>
+        <p:spPr>
+          <a:xfrm>
+            <a:off x="2006732" y="5913128"/>
+            <a:ext cx="1251065" cy="369332"/>
+          </a:xfrm>
+          <a:prstGeom prst="rect">
+            <a:avLst/>
+          </a:prstGeom>
+          <a:noFill/>
+        </p:spPr>
+        <p:txBody>
+          <a:bodyPr wrap="square" rtlCol="0">
+            <a:spAutoFit/>
+          </a:bodyPr>
+          <a:lstStyle/>
+          <a:p>
+            <a:r>
+              <a:rPr kumimoji="1" lang="ja-JP" altLang="en-US" dirty="0">
+                <a:latin typeface="HGP明朝B" panose="02020800000000000000" pitchFamily="18" charset="-128"/>
+                <a:ea typeface="HGP明朝B" panose="02020800000000000000" pitchFamily="18" charset="-128"/>
+              </a:rPr>
+              <a:t>クレジット</a:t>
+            </a:r>
+          </a:p>
+        </p:txBody>
+      </p:sp>
+      <p:cxnSp>
+        <p:nvCxnSpPr>
+          <p:cNvPr id="11" name="直線コネクタ 10">
+            <a:extLst>
+              <a:ext uri="{FF2B5EF4-FFF2-40B4-BE49-F238E27FC236}">
+                <a16:creationId xmlns:a16="http://schemas.microsoft.com/office/drawing/2014/main" id="{8ED350A8-5F65-4ED4-8517-1A102E911454}"/>
+              </a:ext>
+            </a:extLst>
+          </p:cNvPr>
+          <p:cNvCxnSpPr/>
+          <p:nvPr/>
+        </p:nvCxnSpPr>
+        <p:spPr>
+          <a:xfrm flipH="1">
+            <a:off x="2867891" y="5533901"/>
+            <a:ext cx="1205345" cy="441780"/>
+          </a:xfrm>
+          <a:prstGeom prst="line">
+            <a:avLst/>
+          </a:prstGeom>
+        </p:spPr>
+        <p:style>
+          <a:lnRef idx="3">
+            <a:schemeClr val="dk1"/>
+          </a:lnRef>
+          <a:fillRef idx="0">
+            <a:schemeClr val="dk1"/>
+          </a:fillRef>
+          <a:effectRef idx="2">
+            <a:schemeClr val="dk1"/>
+          </a:effectRef>
+          <a:fontRef idx="minor">
+            <a:schemeClr val="tx1"/>
+          </a:fontRef>
+        </p:style>
+      </p:cxnSp>
+      <p:cxnSp>
+        <p:nvCxnSpPr>
+          <p:cNvPr id="13" name="直線コネクタ 12">
+            <a:extLst>
+              <a:ext uri="{FF2B5EF4-FFF2-40B4-BE49-F238E27FC236}">
+                <a16:creationId xmlns:a16="http://schemas.microsoft.com/office/drawing/2014/main" id="{01136FE1-37A9-49BF-B58E-4EEE3D6E3AFF}"/>
+              </a:ext>
+            </a:extLst>
+          </p:cNvPr>
+          <p:cNvCxnSpPr/>
+          <p:nvPr/>
+        </p:nvCxnSpPr>
+        <p:spPr>
+          <a:xfrm flipH="1" flipV="1">
+            <a:off x="2689761" y="1460665"/>
+            <a:ext cx="1229096" cy="77190"/>
+          </a:xfrm>
+          <a:prstGeom prst="line">
+            <a:avLst/>
+          </a:prstGeom>
+        </p:spPr>
+        <p:style>
+          <a:lnRef idx="3">
+            <a:schemeClr val="dk1"/>
+          </a:lnRef>
+          <a:fillRef idx="0">
+            <a:schemeClr val="dk1"/>
+          </a:fillRef>
+          <a:effectRef idx="2">
+            <a:schemeClr val="dk1"/>
+          </a:effectRef>
+          <a:fontRef idx="minor">
+            <a:schemeClr val="tx1"/>
+          </a:fontRef>
+        </p:style>
+      </p:cxnSp>
+      <p:sp>
+        <p:nvSpPr>
+          <p:cNvPr id="15" name="テキスト ボックス 14">
+            <a:extLst>
+              <a:ext uri="{FF2B5EF4-FFF2-40B4-BE49-F238E27FC236}">
+                <a16:creationId xmlns:a16="http://schemas.microsoft.com/office/drawing/2014/main" id="{7EA86816-7862-4110-A96D-CF04D13B3AC0}"/>
+              </a:ext>
+            </a:extLst>
+          </p:cNvPr>
+          <p:cNvSpPr txBox="1"/>
+          <p:nvPr/>
+        </p:nvSpPr>
+        <p:spPr>
+          <a:xfrm>
+            <a:off x="1254380" y="1275999"/>
+            <a:ext cx="1435381" cy="369332"/>
+          </a:xfrm>
+          <a:prstGeom prst="rect">
+            <a:avLst/>
+          </a:prstGeom>
+          <a:noFill/>
+        </p:spPr>
+        <p:txBody>
+          <a:bodyPr wrap="square" rtlCol="0">
+            <a:spAutoFit/>
+          </a:bodyPr>
+          <a:lstStyle/>
+          <a:p>
+            <a:r>
+              <a:rPr kumimoji="1" lang="ja-JP" altLang="en-US" dirty="0">
+                <a:latin typeface="HGP明朝B" panose="02020800000000000000" pitchFamily="18" charset="-128"/>
+                <a:ea typeface="HGP明朝B" panose="02020800000000000000" pitchFamily="18" charset="-128"/>
+              </a:rPr>
+              <a:t>残りゲーム数</a:t>
+            </a:r>
+          </a:p>
+        </p:txBody>
+      </p:sp>
+      <p:sp>
+        <p:nvSpPr>
+          <p:cNvPr id="16" name="テキスト ボックス 15">
+            <a:extLst>
+              <a:ext uri="{FF2B5EF4-FFF2-40B4-BE49-F238E27FC236}">
+                <a16:creationId xmlns:a16="http://schemas.microsoft.com/office/drawing/2014/main" id="{6AEF7C81-6793-4C88-9582-9074D9895BA1}"/>
+              </a:ext>
+            </a:extLst>
+          </p:cNvPr>
+          <p:cNvSpPr txBox="1"/>
+          <p:nvPr/>
+        </p:nvSpPr>
+        <p:spPr>
+          <a:xfrm>
+            <a:off x="10111641" y="1005433"/>
+            <a:ext cx="1251065" cy="369332"/>
+          </a:xfrm>
+          <a:prstGeom prst="rect">
+            <a:avLst/>
+          </a:prstGeom>
+          <a:noFill/>
+        </p:spPr>
+        <p:txBody>
+          <a:bodyPr wrap="square" rtlCol="0">
+            <a:spAutoFit/>
+          </a:bodyPr>
+          <a:lstStyle/>
+          <a:p>
+            <a:r>
+              <a:rPr lang="ja-JP" altLang="en-US" dirty="0">
+                <a:latin typeface="HGP明朝B" panose="02020800000000000000" pitchFamily="18" charset="-128"/>
+                <a:ea typeface="HGP明朝B" panose="02020800000000000000" pitchFamily="18" charset="-128"/>
+              </a:rPr>
+              <a:t>獲得枚数</a:t>
+            </a:r>
+            <a:endParaRPr kumimoji="1" lang="ja-JP" altLang="en-US" dirty="0">
+              <a:latin typeface="HGP明朝B" panose="02020800000000000000" pitchFamily="18" charset="-128"/>
+              <a:ea typeface="HGP明朝B" panose="02020800000000000000" pitchFamily="18" charset="-128"/>
+            </a:endParaRPr>
+          </a:p>
+        </p:txBody>
+      </p:sp>
+      <p:cxnSp>
+        <p:nvCxnSpPr>
+          <p:cNvPr id="17" name="直線コネクタ 16">
+            <a:extLst>
+              <a:ext uri="{FF2B5EF4-FFF2-40B4-BE49-F238E27FC236}">
+                <a16:creationId xmlns:a16="http://schemas.microsoft.com/office/drawing/2014/main" id="{0D49F46D-063E-40FE-B253-05C4A6E9CF82}"/>
+              </a:ext>
+            </a:extLst>
+          </p:cNvPr>
+          <p:cNvCxnSpPr>
+            <a:endCxn id="16" idx="1"/>
+          </p:cNvCxnSpPr>
+          <p:nvPr/>
+        </p:nvCxnSpPr>
+        <p:spPr>
+          <a:xfrm flipV="1">
+            <a:off x="9048997" y="1190099"/>
+            <a:ext cx="1062644" cy="413070"/>
+          </a:xfrm>
+          <a:prstGeom prst="line">
+            <a:avLst/>
+          </a:prstGeom>
+        </p:spPr>
+        <p:style>
+          <a:lnRef idx="3">
+            <a:schemeClr val="dk1"/>
+          </a:lnRef>
+          <a:fillRef idx="0">
+            <a:schemeClr val="dk1"/>
+          </a:fillRef>
+          <a:effectRef idx="2">
+            <a:schemeClr val="dk1"/>
+          </a:effectRef>
+          <a:fontRef idx="minor">
+            <a:schemeClr val="tx1"/>
+          </a:fontRef>
+        </p:style>
+      </p:cxnSp>
+      <p:sp>
+        <p:nvSpPr>
+          <p:cNvPr id="19" name="テキスト ボックス 18">
+            <a:extLst>
+              <a:ext uri="{FF2B5EF4-FFF2-40B4-BE49-F238E27FC236}">
+                <a16:creationId xmlns:a16="http://schemas.microsoft.com/office/drawing/2014/main" id="{9FA554B8-BEB6-4822-9C43-9BA282864AD6}"/>
+              </a:ext>
+            </a:extLst>
+          </p:cNvPr>
+          <p:cNvSpPr txBox="1"/>
+          <p:nvPr/>
+        </p:nvSpPr>
+        <p:spPr>
+          <a:xfrm>
+            <a:off x="10610404" y="3494314"/>
+            <a:ext cx="1251065" cy="369332"/>
+          </a:xfrm>
+          <a:prstGeom prst="rect">
+            <a:avLst/>
+          </a:prstGeom>
+          <a:noFill/>
+        </p:spPr>
+        <p:txBody>
+          <a:bodyPr wrap="square" rtlCol="0">
+            <a:spAutoFit/>
+          </a:bodyPr>
+          <a:lstStyle/>
+          <a:p>
+            <a:r>
+              <a:rPr lang="ja-JP" altLang="en-US" dirty="0">
+                <a:latin typeface="HGP明朝B" panose="02020800000000000000" pitchFamily="18" charset="-128"/>
+                <a:ea typeface="HGP明朝B" panose="02020800000000000000" pitchFamily="18" charset="-128"/>
               </a:rPr>
               <a:t>小役履歴</a:t>
             </a:r>
-          </a:p>
-        </p:txBody>
-      </p:sp>
-      <p:sp>
-        <p:nvSpPr>
-          <p:cNvPr id="3" name="コンテンツ プレースホルダー 2">
-            <a:extLst>
-              <a:ext uri="{FF2B5EF4-FFF2-40B4-BE49-F238E27FC236}">
-                <a16:creationId xmlns:a16="http://schemas.microsoft.com/office/drawing/2014/main" id="{B5984292-F046-411C-B518-9C12D76BE143}"/>
-              </a:ext>
-            </a:extLst>
-          </p:cNvPr>
-          <p:cNvSpPr>
-            <a:spLocks noGrp="1"/>
-          </p:cNvSpPr>
-          <p:nvPr>
-            <p:ph idx="1"/>
-          </p:nvPr>
-        </p:nvSpPr>
-        <p:spPr/>
-        <p:txBody>
-          <a:bodyPr/>
-          <a:lstStyle/>
-          <a:p>
-            <a:r>
-              <a:rPr kumimoji="1" lang="ja-JP" altLang="en-US" dirty="0"/>
-              <a:t>ゴジエヴァやゴットのように演出を</a:t>
-            </a:r>
+            <a:endParaRPr kumimoji="1" lang="ja-JP" altLang="en-US" dirty="0">
+              <a:latin typeface="HGP明朝B" panose="02020800000000000000" pitchFamily="18" charset="-128"/>
+              <a:ea typeface="HGP明朝B" panose="02020800000000000000" pitchFamily="18" charset="-128"/>
+            </a:endParaRPr>
+          </a:p>
+        </p:txBody>
+      </p:sp>
+      <p:cxnSp>
+        <p:nvCxnSpPr>
+          <p:cNvPr id="20" name="直線コネクタ 19">
+            <a:extLst>
+              <a:ext uri="{FF2B5EF4-FFF2-40B4-BE49-F238E27FC236}">
+                <a16:creationId xmlns:a16="http://schemas.microsoft.com/office/drawing/2014/main" id="{826662AF-AF24-42B6-BF66-44ED5870570C}"/>
+              </a:ext>
+            </a:extLst>
+          </p:cNvPr>
+          <p:cNvCxnSpPr>
+            <a:endCxn id="19" idx="1"/>
+          </p:cNvCxnSpPr>
+          <p:nvPr/>
+        </p:nvCxnSpPr>
+        <p:spPr>
+          <a:xfrm flipV="1">
+            <a:off x="8888681" y="3678980"/>
+            <a:ext cx="1721723" cy="18699"/>
+          </a:xfrm>
+          <a:prstGeom prst="line">
+            <a:avLst/>
+          </a:prstGeom>
+        </p:spPr>
+        <p:style>
+          <a:lnRef idx="3">
+            <a:schemeClr val="dk1"/>
+          </a:lnRef>
+          <a:fillRef idx="0">
+            <a:schemeClr val="dk1"/>
+          </a:fillRef>
+          <a:effectRef idx="2">
+            <a:schemeClr val="dk1"/>
+          </a:effectRef>
+          <a:fontRef idx="minor">
+            <a:schemeClr val="tx1"/>
+          </a:fontRef>
+        </p:style>
+      </p:cxnSp>
+      <p:cxnSp>
+        <p:nvCxnSpPr>
+          <p:cNvPr id="22" name="直線コネクタ 21">
+            <a:extLst>
+              <a:ext uri="{FF2B5EF4-FFF2-40B4-BE49-F238E27FC236}">
+                <a16:creationId xmlns:a16="http://schemas.microsoft.com/office/drawing/2014/main" id="{A1A8002E-7139-4789-86B0-90B37028F59F}"/>
+              </a:ext>
+            </a:extLst>
+          </p:cNvPr>
+          <p:cNvCxnSpPr>
+            <a:cxnSpLocks/>
+          </p:cNvCxnSpPr>
+          <p:nvPr/>
+        </p:nvCxnSpPr>
+        <p:spPr>
+          <a:xfrm flipV="1">
+            <a:off x="8888681" y="3075709"/>
+            <a:ext cx="1324098" cy="166255"/>
+          </a:xfrm>
+          <a:prstGeom prst="line">
+            <a:avLst/>
+          </a:prstGeom>
+        </p:spPr>
+        <p:style>
+          <a:lnRef idx="3">
+            <a:schemeClr val="dk1"/>
+          </a:lnRef>
+          <a:fillRef idx="0">
+            <a:schemeClr val="dk1"/>
+          </a:fillRef>
+          <a:effectRef idx="2">
+            <a:schemeClr val="dk1"/>
+          </a:effectRef>
+          <a:fontRef idx="minor">
+            <a:schemeClr val="tx1"/>
+          </a:fontRef>
+        </p:style>
+      </p:cxnSp>
+      <p:sp>
+        <p:nvSpPr>
+          <p:cNvPr id="25" name="テキスト ボックス 24">
+            <a:extLst>
+              <a:ext uri="{FF2B5EF4-FFF2-40B4-BE49-F238E27FC236}">
+                <a16:creationId xmlns:a16="http://schemas.microsoft.com/office/drawing/2014/main" id="{3CC2BFE8-CA5B-4859-8DC3-CD35EE1A98F3}"/>
+              </a:ext>
+            </a:extLst>
+          </p:cNvPr>
+          <p:cNvSpPr txBox="1"/>
+          <p:nvPr/>
+        </p:nvSpPr>
+        <p:spPr>
+          <a:xfrm>
+            <a:off x="10212779" y="2891043"/>
+            <a:ext cx="1251065" cy="369332"/>
+          </a:xfrm>
+          <a:prstGeom prst="rect">
+            <a:avLst/>
+          </a:prstGeom>
+          <a:noFill/>
+        </p:spPr>
+        <p:txBody>
+          <a:bodyPr wrap="square" rtlCol="0">
+            <a:spAutoFit/>
+          </a:bodyPr>
+          <a:lstStyle/>
+          <a:p>
+            <a:r>
+              <a:rPr lang="ja-JP" altLang="en-US" dirty="0">
+                <a:latin typeface="HGP明朝B" panose="02020800000000000000" pitchFamily="18" charset="-128"/>
+                <a:ea typeface="HGP明朝B" panose="02020800000000000000" pitchFamily="18" charset="-128"/>
+              </a:rPr>
+              <a:t>何かに使う</a:t>
+            </a:r>
+            <a:endParaRPr kumimoji="1" lang="ja-JP" altLang="en-US" dirty="0">
+              <a:latin typeface="HGP明朝B" panose="02020800000000000000" pitchFamily="18" charset="-128"/>
+              <a:ea typeface="HGP明朝B" panose="02020800000000000000" pitchFamily="18" charset="-128"/>
+            </a:endParaRPr>
           </a:p>
         </p:txBody>
       </p:sp>
     </p:spTree>
     <p:extLst>
       <p:ext uri="{BB962C8B-B14F-4D97-AF65-F5344CB8AC3E}">
-        <p14:creationId xmlns:p14="http://schemas.microsoft.com/office/powerpoint/2010/main" val="2408265062"/>
+        <p14:creationId xmlns:p14="http://schemas.microsoft.com/office/powerpoint/2010/main" val="430407315"/>
       </p:ext>
     </p:extLst>
   </p:cSld>
@@ -4673,7 +5516,7 @@
           <p:cNvPr id="2" name="タイトル 1">
             <a:extLst>
               <a:ext uri="{FF2B5EF4-FFF2-40B4-BE49-F238E27FC236}">
-                <a16:creationId xmlns:a16="http://schemas.microsoft.com/office/drawing/2014/main" id="{947F6CE5-ECE4-4571-AE7B-4E500E2B8CAC}"/>
+                <a16:creationId xmlns:a16="http://schemas.microsoft.com/office/drawing/2014/main" id="{F2210D5E-1F1D-4B41-B9CC-86FD4387A12B}"/>
               </a:ext>
             </a:extLst>
           </p:cNvPr>
@@ -4690,23 +5533,26 @@
           <a:lstStyle/>
           <a:p>
             <a:r>
+              <a:rPr kumimoji="1" lang="en-US" altLang="ja-JP" dirty="0">
+                <a:latin typeface="HGP創英ﾌﾟﾚｾﾞﾝｽEB" panose="02020800000000000000" pitchFamily="18" charset="-128"/>
+                <a:ea typeface="HGP創英ﾌﾟﾚｾﾞﾝｽEB" panose="02020800000000000000" pitchFamily="18" charset="-128"/>
+              </a:rPr>
+              <a:t>※</a:t>
+            </a:r>
+            <a:r>
+              <a:rPr lang="ja-JP" altLang="en-US" dirty="0">
+                <a:latin typeface="HGP創英ﾌﾟﾚｾﾞﾝｽEB" panose="02020800000000000000" pitchFamily="18" charset="-128"/>
+                <a:ea typeface="HGP創英ﾌﾟﾚｾﾞﾝｽEB" panose="02020800000000000000" pitchFamily="18" charset="-128"/>
+              </a:rPr>
+              <a:t>覚醒</a:t>
+            </a:r>
+            <a:r>
               <a:rPr kumimoji="1" lang="ja-JP" altLang="en-US" dirty="0">
-                <a:latin typeface="HGS創英ﾌﾟﾚｾﾞﾝｽEB" panose="02020800000000000000" pitchFamily="18" charset="-128"/>
-                <a:ea typeface="HGS創英ﾌﾟﾚｾﾞﾝｽEB" panose="02020800000000000000" pitchFamily="18" charset="-128"/>
+                <a:latin typeface="HGP創英ﾌﾟﾚｾﾞﾝｽEB" panose="02020800000000000000" pitchFamily="18" charset="-128"/>
+                <a:ea typeface="HGP創英ﾌﾟﾚｾﾞﾝｽEB" panose="02020800000000000000" pitchFamily="18" charset="-128"/>
               </a:rPr>
-              <a:t>特化</a:t>
-            </a:r>
-            <a:r>
-              <a:rPr kumimoji="1" lang="en-US" altLang="ja-JP" dirty="0">
-                <a:latin typeface="HGS創英ﾌﾟﾚｾﾞﾝｽEB" panose="02020800000000000000" pitchFamily="18" charset="-128"/>
-                <a:ea typeface="HGS創英ﾌﾟﾚｾﾞﾝｽEB" panose="02020800000000000000" pitchFamily="18" charset="-128"/>
-              </a:rPr>
-              <a:t>ZONE</a:t>
-            </a:r>
-            <a:endParaRPr kumimoji="1" lang="ja-JP" altLang="en-US" dirty="0">
-              <a:latin typeface="HGS創英ﾌﾟﾚｾﾞﾝｽEB" panose="02020800000000000000" pitchFamily="18" charset="-128"/>
-              <a:ea typeface="HGS創英ﾌﾟﾚｾﾞﾝｽEB" panose="02020800000000000000" pitchFamily="18" charset="-128"/>
-            </a:endParaRPr>
+              <a:t>リプレイ高確率</a:t>
+            </a:r>
           </a:p>
         </p:txBody>
       </p:sp>
@@ -4715,7 +5561,7 @@
           <p:cNvPr id="3" name="コンテンツ プレースホルダー 2">
             <a:extLst>
               <a:ext uri="{FF2B5EF4-FFF2-40B4-BE49-F238E27FC236}">
-                <a16:creationId xmlns:a16="http://schemas.microsoft.com/office/drawing/2014/main" id="{F9BA4085-8CC2-45B9-8120-C1FF4A492A76}"/>
+                <a16:creationId xmlns:a16="http://schemas.microsoft.com/office/drawing/2014/main" id="{2C5C413C-10E0-4BFF-89CA-A6B7A3658262}"/>
               </a:ext>
             </a:extLst>
           </p:cNvPr>
@@ -4731,14 +5577,14 @@
           <a:bodyPr/>
           <a:lstStyle/>
           <a:p>
-            <a:endParaRPr kumimoji="1" lang="ja-JP" altLang="en-US" dirty="0"/>
+            <a:endParaRPr kumimoji="1" lang="ja-JP" altLang="en-US"/>
           </a:p>
         </p:txBody>
       </p:sp>
     </p:spTree>
     <p:extLst>
       <p:ext uri="{BB962C8B-B14F-4D97-AF65-F5344CB8AC3E}">
-        <p14:creationId xmlns:p14="http://schemas.microsoft.com/office/powerpoint/2010/main" val="2675775565"/>
+        <p14:creationId xmlns:p14="http://schemas.microsoft.com/office/powerpoint/2010/main" val="2369238382"/>
       </p:ext>
     </p:extLst>
   </p:cSld>
@@ -4770,7 +5616,7 @@
           <p:cNvPr id="2" name="タイトル 1">
             <a:extLst>
               <a:ext uri="{FF2B5EF4-FFF2-40B4-BE49-F238E27FC236}">
-                <a16:creationId xmlns:a16="http://schemas.microsoft.com/office/drawing/2014/main" id="{A0FB8B07-D550-433A-8BF7-5B2AEAED175A}"/>
+                <a16:creationId xmlns:a16="http://schemas.microsoft.com/office/drawing/2014/main" id="{B85BF969-81D7-4DF0-8ECC-B2B51B744350}"/>
               </a:ext>
             </a:extLst>
           </p:cNvPr>
@@ -4788,10 +5634,24 @@
           <a:p>
             <a:r>
               <a:rPr kumimoji="1" lang="ja-JP" altLang="en-US" dirty="0">
-                <a:latin typeface="HGS創英ﾌﾟﾚｾﾞﾝｽEB" panose="02020800000000000000" pitchFamily="18" charset="-128"/>
-                <a:ea typeface="HGS創英ﾌﾟﾚｾﾞﾝｽEB" panose="02020800000000000000" pitchFamily="18" charset="-128"/>
+                <a:latin typeface="HGP創英ﾌﾟﾚｾﾞﾝｽEB" panose="02020800000000000000" pitchFamily="18" charset="-128"/>
+                <a:ea typeface="HGP創英ﾌﾟﾚｾﾞﾝｽEB" panose="02020800000000000000" pitchFamily="18" charset="-128"/>
               </a:rPr>
-              <a:t>ゲーム数発展</a:t>
+              <a:t>ラッシュ中の直乗せ</a:t>
+            </a:r>
+            <a:r>
+              <a:rPr kumimoji="1" lang="en-US" altLang="ja-JP" dirty="0">
+                <a:latin typeface="HGP創英ﾌﾟﾚｾﾞﾝｽEB" panose="02020800000000000000" pitchFamily="18" charset="-128"/>
+                <a:ea typeface="HGP創英ﾌﾟﾚｾﾞﾝｽEB" panose="02020800000000000000" pitchFamily="18" charset="-128"/>
+              </a:rPr>
+              <a:t>…</a:t>
+            </a:r>
+            <a:r>
+              <a:rPr kumimoji="1" lang="ja-JP" altLang="en-US" dirty="0">
+                <a:latin typeface="HGP創英ﾌﾟﾚｾﾞﾝｽEB" panose="02020800000000000000" pitchFamily="18" charset="-128"/>
+                <a:ea typeface="HGP創英ﾌﾟﾚｾﾞﾝｽEB" panose="02020800000000000000" pitchFamily="18" charset="-128"/>
+              </a:rPr>
+              <a:t>あり</a:t>
             </a:r>
           </a:p>
         </p:txBody>
@@ -4801,7 +5661,7 @@
           <p:cNvPr id="3" name="コンテンツ プレースホルダー 2">
             <a:extLst>
               <a:ext uri="{FF2B5EF4-FFF2-40B4-BE49-F238E27FC236}">
-                <a16:creationId xmlns:a16="http://schemas.microsoft.com/office/drawing/2014/main" id="{406FC1F0-9D12-461B-906E-7D967A081701}"/>
+                <a16:creationId xmlns:a16="http://schemas.microsoft.com/office/drawing/2014/main" id="{76AD72F4-A7B5-4B72-8646-E5394C0FDFC6}"/>
               </a:ext>
             </a:extLst>
           </p:cNvPr>
@@ -4817,14 +5677,22 @@
           <a:bodyPr/>
           <a:lstStyle/>
           <a:p>
-            <a:endParaRPr kumimoji="1" lang="ja-JP" altLang="en-US"/>
+            <a:r>
+              <a:rPr kumimoji="1" lang="ja-JP" altLang="en-US" dirty="0"/>
+              <a:t>演出</a:t>
+            </a:r>
+            <a:r>
+              <a:rPr lang="ja-JP" altLang="en-US" dirty="0"/>
+              <a:t>中はキャラが出てから上乗せを参考にする</a:t>
+            </a:r>
+            <a:endParaRPr kumimoji="1" lang="ja-JP" altLang="en-US" dirty="0"/>
           </a:p>
         </p:txBody>
       </p:sp>
     </p:spTree>
     <p:extLst>
       <p:ext uri="{BB962C8B-B14F-4D97-AF65-F5344CB8AC3E}">
-        <p14:creationId xmlns:p14="http://schemas.microsoft.com/office/powerpoint/2010/main" val="4285642502"/>
+        <p14:creationId xmlns:p14="http://schemas.microsoft.com/office/powerpoint/2010/main" val="4125349606"/>
       </p:ext>
     </p:extLst>
   </p:cSld>
@@ -4856,7 +5724,7 @@
           <p:cNvPr id="2" name="タイトル 1">
             <a:extLst>
               <a:ext uri="{FF2B5EF4-FFF2-40B4-BE49-F238E27FC236}">
-                <a16:creationId xmlns:a16="http://schemas.microsoft.com/office/drawing/2014/main" id="{52CF1521-55D2-4666-A1BE-91267A0B0195}"/>
+                <a16:creationId xmlns:a16="http://schemas.microsoft.com/office/drawing/2014/main" id="{59ED1BAB-22A6-447B-99E3-2277ECF2E9E7}"/>
               </a:ext>
             </a:extLst>
           </p:cNvPr>
@@ -4877,7 +5745,7 @@
                 <a:latin typeface="HGS創英ﾌﾟﾚｾﾞﾝｽEB" panose="02020800000000000000" pitchFamily="18" charset="-128"/>
                 <a:ea typeface="HGS創英ﾌﾟﾚｾﾞﾝｽEB" panose="02020800000000000000" pitchFamily="18" charset="-128"/>
               </a:rPr>
-              <a:t>ボーナス</a:t>
+              <a:t>小役履歴</a:t>
             </a:r>
           </a:p>
         </p:txBody>
@@ -4887,7 +5755,7 @@
           <p:cNvPr id="3" name="コンテンツ プレースホルダー 2">
             <a:extLst>
               <a:ext uri="{FF2B5EF4-FFF2-40B4-BE49-F238E27FC236}">
-                <a16:creationId xmlns:a16="http://schemas.microsoft.com/office/drawing/2014/main" id="{B876A347-A883-4D5D-A792-E875F7F66CC5}"/>
+                <a16:creationId xmlns:a16="http://schemas.microsoft.com/office/drawing/2014/main" id="{B5984292-F046-411C-B518-9C12D76BE143}"/>
               </a:ext>
             </a:extLst>
           </p:cNvPr>
@@ -4903,14 +5771,184 @@
           <a:bodyPr/>
           <a:lstStyle/>
           <a:p>
-            <a:endParaRPr kumimoji="1" lang="ja-JP" altLang="en-US"/>
-          </a:p>
-        </p:txBody>
-      </p:sp>
+            <a:r>
+              <a:rPr kumimoji="1" lang="ja-JP" altLang="en-US" dirty="0">
+                <a:latin typeface="HGP明朝B" panose="02020800000000000000" pitchFamily="18" charset="-128"/>
+                <a:ea typeface="HGP明朝B" panose="02020800000000000000" pitchFamily="18" charset="-128"/>
+              </a:rPr>
+              <a:t>ゴジエヴァやゴットのように演出を</a:t>
+            </a:r>
+            <a:endParaRPr kumimoji="1" lang="en-US" altLang="ja-JP" dirty="0">
+              <a:latin typeface="HGP明朝B" panose="02020800000000000000" pitchFamily="18" charset="-128"/>
+              <a:ea typeface="HGP明朝B" panose="02020800000000000000" pitchFamily="18" charset="-128"/>
+            </a:endParaRPr>
+          </a:p>
+          <a:p>
+            <a:r>
+              <a:rPr lang="ja-JP" altLang="en-US" dirty="0">
+                <a:latin typeface="HGP明朝B" panose="02020800000000000000" pitchFamily="18" charset="-128"/>
+                <a:ea typeface="HGP明朝B" panose="02020800000000000000" pitchFamily="18" charset="-128"/>
+              </a:rPr>
+              <a:t>レア役は３連、リプレイは５連で濃厚</a:t>
+            </a:r>
+            <a:endParaRPr lang="en-US" altLang="ja-JP" dirty="0">
+              <a:latin typeface="HGP明朝B" panose="02020800000000000000" pitchFamily="18" charset="-128"/>
+              <a:ea typeface="HGP明朝B" panose="02020800000000000000" pitchFamily="18" charset="-128"/>
+            </a:endParaRPr>
+          </a:p>
+          <a:p>
+            <a:pPr marL="0" indent="0">
+              <a:buNone/>
+            </a:pPr>
+            <a:endParaRPr kumimoji="1" lang="ja-JP" altLang="en-US" dirty="0"/>
+          </a:p>
+        </p:txBody>
+      </p:sp>
+      <p:pic>
+        <p:nvPicPr>
+          <p:cNvPr id="1026" name="Picture 2" descr="ゴブスレ2 スマスロ】AT「ゴブリンスレイヤーRUSH」">
+            <a:extLst>
+              <a:ext uri="{FF2B5EF4-FFF2-40B4-BE49-F238E27FC236}">
+                <a16:creationId xmlns:a16="http://schemas.microsoft.com/office/drawing/2014/main" id="{819DA8D3-740D-4BCF-87D8-E46E3A89CD7C}"/>
+              </a:ext>
+            </a:extLst>
+          </p:cNvPr>
+          <p:cNvPicPr>
+            <a:picLocks noChangeAspect="1" noChangeArrowheads="1"/>
+          </p:cNvPicPr>
+          <p:nvPr/>
+        </p:nvPicPr>
+        <p:blipFill>
+          <a:blip r:embed="rId2">
+            <a:extLst>
+              <a:ext uri="{28A0092B-C50C-407E-A947-70E740481C1C}">
+                <a14:useLocalDpi xmlns:a14="http://schemas.microsoft.com/office/drawing/2010/main" val="0"/>
+              </a:ext>
+            </a:extLst>
+          </a:blip>
+          <a:srcRect/>
+          <a:stretch>
+            <a:fillRect/>
+          </a:stretch>
+        </p:blipFill>
+        <p:spPr bwMode="auto">
+          <a:xfrm>
+            <a:off x="7942119" y="3506094"/>
+            <a:ext cx="4055789" cy="3132983"/>
+          </a:xfrm>
+          <a:prstGeom prst="rect">
+            <a:avLst/>
+          </a:prstGeom>
+          <a:noFill/>
+          <a:extLst>
+            <a:ext uri="{909E8E84-426E-40DD-AFC4-6F175D3DCCD1}">
+              <a14:hiddenFill xmlns:a14="http://schemas.microsoft.com/office/drawing/2010/main">
+                <a:solidFill>
+                  <a:srgbClr val="FFFFFF"/>
+                </a:solidFill>
+              </a14:hiddenFill>
+            </a:ext>
+          </a:extLst>
+        </p:spPr>
+      </p:pic>
+      <p:pic>
+        <p:nvPicPr>
+          <p:cNvPr id="1028" name="Picture 4" descr="ミリオンゴッド-神々の凱旋-（パチスロ）設定判別・天井・ゾーン・解析 GOD神々の凱旋">
+            <a:extLst>
+              <a:ext uri="{FF2B5EF4-FFF2-40B4-BE49-F238E27FC236}">
+                <a16:creationId xmlns:a16="http://schemas.microsoft.com/office/drawing/2014/main" id="{B1727CB4-E3C1-432D-8FFF-C4297F692EA0}"/>
+              </a:ext>
+            </a:extLst>
+          </p:cNvPr>
+          <p:cNvPicPr>
+            <a:picLocks noChangeAspect="1" noChangeArrowheads="1"/>
+          </p:cNvPicPr>
+          <p:nvPr/>
+        </p:nvPicPr>
+        <p:blipFill>
+          <a:blip r:embed="rId3">
+            <a:extLst>
+              <a:ext uri="{28A0092B-C50C-407E-A947-70E740481C1C}">
+                <a14:useLocalDpi xmlns:a14="http://schemas.microsoft.com/office/drawing/2010/main" val="0"/>
+              </a:ext>
+            </a:extLst>
+          </a:blip>
+          <a:srcRect/>
+          <a:stretch>
+            <a:fillRect/>
+          </a:stretch>
+        </p:blipFill>
+        <p:spPr bwMode="auto">
+          <a:xfrm>
+            <a:off x="7814330" y="865172"/>
+            <a:ext cx="4183578" cy="2391612"/>
+          </a:xfrm>
+          <a:prstGeom prst="rect">
+            <a:avLst/>
+          </a:prstGeom>
+          <a:noFill/>
+          <a:extLst>
+            <a:ext uri="{909E8E84-426E-40DD-AFC4-6F175D3DCCD1}">
+              <a14:hiddenFill xmlns:a14="http://schemas.microsoft.com/office/drawing/2010/main">
+                <a:solidFill>
+                  <a:srgbClr val="FFFFFF"/>
+                </a:solidFill>
+              </a14:hiddenFill>
+            </a:ext>
+          </a:extLst>
+        </p:spPr>
+      </p:pic>
+      <p:pic>
+        <p:nvPicPr>
+          <p:cNvPr id="1030" name="Picture 6" descr="前兆を経てからの上乗せについて｜L ゴジラ対エヴァンゲリオン｜パチンコパチスロ エヴァンゲリオン系 開発こぼれ話">
+            <a:extLst>
+              <a:ext uri="{FF2B5EF4-FFF2-40B4-BE49-F238E27FC236}">
+                <a16:creationId xmlns:a16="http://schemas.microsoft.com/office/drawing/2014/main" id="{1F2D79F8-E08D-4CBF-8E92-7097EB1FDBE9}"/>
+              </a:ext>
+            </a:extLst>
+          </p:cNvPr>
+          <p:cNvPicPr>
+            <a:picLocks noChangeAspect="1" noChangeArrowheads="1"/>
+          </p:cNvPicPr>
+          <p:nvPr/>
+        </p:nvPicPr>
+        <p:blipFill>
+          <a:blip r:embed="rId4">
+            <a:extLst>
+              <a:ext uri="{28A0092B-C50C-407E-A947-70E740481C1C}">
+                <a14:useLocalDpi xmlns:a14="http://schemas.microsoft.com/office/drawing/2010/main" val="0"/>
+              </a:ext>
+            </a:extLst>
+          </a:blip>
+          <a:srcRect/>
+          <a:stretch>
+            <a:fillRect/>
+          </a:stretch>
+        </p:blipFill>
+        <p:spPr bwMode="auto">
+          <a:xfrm>
+            <a:off x="3898102" y="3506094"/>
+            <a:ext cx="3916228" cy="3132983"/>
+          </a:xfrm>
+          <a:prstGeom prst="rect">
+            <a:avLst/>
+          </a:prstGeom>
+          <a:noFill/>
+          <a:extLst>
+            <a:ext uri="{909E8E84-426E-40DD-AFC4-6F175D3DCCD1}">
+              <a14:hiddenFill xmlns:a14="http://schemas.microsoft.com/office/drawing/2010/main">
+                <a:solidFill>
+                  <a:srgbClr val="FFFFFF"/>
+                </a:solidFill>
+              </a14:hiddenFill>
+            </a:ext>
+          </a:extLst>
+        </p:spPr>
+      </p:pic>
     </p:spTree>
     <p:extLst>
       <p:ext uri="{BB962C8B-B14F-4D97-AF65-F5344CB8AC3E}">
-        <p14:creationId xmlns:p14="http://schemas.microsoft.com/office/powerpoint/2010/main" val="2875294183"/>
+        <p14:creationId xmlns:p14="http://schemas.microsoft.com/office/powerpoint/2010/main" val="2408265062"/>
       </p:ext>
     </p:extLst>
   </p:cSld>
@@ -4942,7 +5980,7 @@
           <p:cNvPr id="2" name="タイトル 1">
             <a:extLst>
               <a:ext uri="{FF2B5EF4-FFF2-40B4-BE49-F238E27FC236}">
-                <a16:creationId xmlns:a16="http://schemas.microsoft.com/office/drawing/2014/main" id="{06CC1E36-7A71-431B-A5E7-D23665CF5C28}"/>
+                <a16:creationId xmlns:a16="http://schemas.microsoft.com/office/drawing/2014/main" id="{A0FB8B07-D550-433A-8BF7-5B2AEAED175A}"/>
               </a:ext>
             </a:extLst>
           </p:cNvPr>
@@ -4958,7 +5996,13 @@
           <a:bodyPr/>
           <a:lstStyle/>
           <a:p>
-            <a:endParaRPr kumimoji="1" lang="ja-JP" altLang="en-US"/>
+            <a:r>
+              <a:rPr kumimoji="1" lang="ja-JP" altLang="en-US" dirty="0">
+                <a:latin typeface="HGS創英ﾌﾟﾚｾﾞﾝｽEB" panose="02020800000000000000" pitchFamily="18" charset="-128"/>
+                <a:ea typeface="HGS創英ﾌﾟﾚｾﾞﾝｽEB" panose="02020800000000000000" pitchFamily="18" charset="-128"/>
+              </a:rPr>
+              <a:t>ゲーム数発展</a:t>
+            </a:r>
           </a:p>
         </p:txBody>
       </p:sp>
@@ -4967,7 +6011,7 @@
           <p:cNvPr id="3" name="コンテンツ プレースホルダー 2">
             <a:extLst>
               <a:ext uri="{FF2B5EF4-FFF2-40B4-BE49-F238E27FC236}">
-                <a16:creationId xmlns:a16="http://schemas.microsoft.com/office/drawing/2014/main" id="{CE390919-33B1-4468-B1DC-595E5C4E41FD}"/>
+                <a16:creationId xmlns:a16="http://schemas.microsoft.com/office/drawing/2014/main" id="{406FC1F0-9D12-461B-906E-7D967A081701}"/>
               </a:ext>
             </a:extLst>
           </p:cNvPr>
@@ -4990,7 +6034,7 @@
     </p:spTree>
     <p:extLst>
       <p:ext uri="{BB962C8B-B14F-4D97-AF65-F5344CB8AC3E}">
-        <p14:creationId xmlns:p14="http://schemas.microsoft.com/office/powerpoint/2010/main" val="2805746876"/>
+        <p14:creationId xmlns:p14="http://schemas.microsoft.com/office/powerpoint/2010/main" val="4285642502"/>
       </p:ext>
     </p:extLst>
   </p:cSld>
